--- a/visualisation.pptx
+++ b/visualisation.pptx
@@ -7999,6 +7999,69 @@
           <a:chExt cx="0" cy="0"/>
         </a:xfrm>
       </p:grpSpPr>
+      <p:pic>
+        <p:nvPicPr>
+          <p:cNvPr id="27" name="Image 26">
+            <a:extLst>
+              <a:ext uri="{FF2B5EF4-FFF2-40B4-BE49-F238E27FC236}">
+                <a16:creationId xmlns:a16="http://schemas.microsoft.com/office/drawing/2014/main" id="{C9F6C2F7-7895-935D-EFA8-FFCC8DA4A5BB}"/>
+              </a:ext>
+            </a:extLst>
+          </p:cNvPr>
+          <p:cNvPicPr>
+            <a:picLocks noChangeAspect="1"/>
+          </p:cNvPicPr>
+          <p:nvPr/>
+        </p:nvPicPr>
+        <p:blipFill>
+          <a:blip r:embed="rId2">
+            <a:alphaModFix amt="85000"/>
+            <a:extLst>
+              <a:ext uri="{28A0092B-C50C-407E-A947-70E740481C1C}">
+                <a14:useLocalDpi xmlns:a14="http://schemas.microsoft.com/office/drawing/2010/main" val="0"/>
+              </a:ext>
+            </a:extLst>
+          </a:blip>
+          <a:stretch>
+            <a:fillRect/>
+          </a:stretch>
+        </p:blipFill>
+        <p:spPr>
+          <a:xfrm>
+            <a:off x="2526890" y="238497"/>
+            <a:ext cx="7895303" cy="6619503"/>
+          </a:xfrm>
+          <a:prstGeom prst="roundRect">
+            <a:avLst>
+              <a:gd name="adj" fmla="val 4167"/>
+            </a:avLst>
+          </a:prstGeom>
+          <a:solidFill>
+            <a:srgbClr val="FFFFFF"/>
+          </a:solidFill>
+          <a:ln w="76200" cap="sq">
+            <a:solidFill>
+              <a:srgbClr val="292929"/>
+            </a:solidFill>
+            <a:miter lim="800000"/>
+          </a:ln>
+          <a:effectLst>
+            <a:reflection blurRad="12700" stA="28000" endPos="28000" dist="5000" dir="5400000" sy="-100000" algn="bl" rotWithShape="0"/>
+          </a:effectLst>
+          <a:scene3d>
+            <a:camera prst="orthographicFront"/>
+            <a:lightRig rig="threePt" dir="t">
+              <a:rot lat="0" lon="0" rev="2700000"/>
+            </a:lightRig>
+          </a:scene3d>
+          <a:sp3d>
+            <a:bevelT h="38100"/>
+            <a:contourClr>
+              <a:srgbClr val="C0C0C0"/>
+            </a:contourClr>
+          </a:sp3d>
+        </p:spPr>
+      </p:pic>
       <p:sp>
         <p:nvSpPr>
           <p:cNvPr id="13" name="Rectangle 12">
@@ -8013,7 +8076,7 @@
         </p:nvSpPr>
         <p:spPr>
           <a:xfrm>
-            <a:off x="2769002" y="1579963"/>
+            <a:off x="2621525" y="1550200"/>
             <a:ext cx="7479892" cy="795029"/>
           </a:xfrm>
           <a:prstGeom prst="rect">
@@ -8049,57 +8112,6 @@
       </p:sp>
       <p:sp>
         <p:nvSpPr>
-          <p:cNvPr id="6" name="Rectangle 5">
-            <a:extLst>
-              <a:ext uri="{FF2B5EF4-FFF2-40B4-BE49-F238E27FC236}">
-                <a16:creationId xmlns:a16="http://schemas.microsoft.com/office/drawing/2014/main" id="{0889D4E4-5A69-812E-CABF-F3F509A68B42}"/>
-              </a:ext>
-            </a:extLst>
-          </p:cNvPr>
-          <p:cNvSpPr/>
-          <p:nvPr/>
-        </p:nvSpPr>
-        <p:spPr>
-          <a:xfrm>
-            <a:off x="3645303" y="2741659"/>
-            <a:ext cx="5727290" cy="3320845"/>
-          </a:xfrm>
-          <a:prstGeom prst="rect">
-            <a:avLst/>
-          </a:prstGeom>
-          <a:ln/>
-        </p:spPr>
-        <p:style>
-          <a:lnRef idx="2">
-            <a:schemeClr val="accent1">
-              <a:shade val="15000"/>
-            </a:schemeClr>
-          </a:lnRef>
-          <a:fillRef idx="1">
-            <a:schemeClr val="accent1"/>
-          </a:fillRef>
-          <a:effectRef idx="0">
-            <a:schemeClr val="accent1"/>
-          </a:effectRef>
-          <a:fontRef idx="minor">
-            <a:schemeClr val="lt1"/>
-          </a:fontRef>
-        </p:style>
-        <p:txBody>
-          <a:bodyPr rtlCol="0" anchor="ctr"/>
-          <a:lstStyle/>
-          <a:p>
-            <a:pPr algn="ctr"/>
-            <a:r>
-              <a:rPr lang="en-CA" sz="3600" dirty="0"/>
-              <a:t>Carte du Comte</a:t>
-            </a:r>
-            <a:endParaRPr lang="fr-CA" sz="3600" dirty="0"/>
-          </a:p>
-        </p:txBody>
-      </p:sp>
-      <p:sp>
-        <p:nvSpPr>
           <p:cNvPr id="7" name="Rectangle 6">
             <a:extLst>
               <a:ext uri="{FF2B5EF4-FFF2-40B4-BE49-F238E27FC236}">
@@ -8346,10 +8358,10 @@
       </p:sp>
       <p:sp>
         <p:nvSpPr>
-          <p:cNvPr id="19" name="Triangle isocèle 18">
-            <a:extLst>
-              <a:ext uri="{FF2B5EF4-FFF2-40B4-BE49-F238E27FC236}">
-                <a16:creationId xmlns:a16="http://schemas.microsoft.com/office/drawing/2014/main" id="{4DA3A9DB-01EA-169E-D669-91F7E6D37BC8}"/>
+          <p:cNvPr id="22" name="Rectangle 21">
+            <a:extLst>
+              <a:ext uri="{FF2B5EF4-FFF2-40B4-BE49-F238E27FC236}">
+                <a16:creationId xmlns:a16="http://schemas.microsoft.com/office/drawing/2014/main" id="{1E5095F3-2E57-13D7-9641-7C99CA3CDE44}"/>
               </a:ext>
             </a:extLst>
           </p:cNvPr>
@@ -8358,10 +8370,10 @@
         </p:nvSpPr>
         <p:spPr>
           <a:xfrm>
-            <a:off x="2753031" y="728990"/>
-            <a:ext cx="7479892" cy="795029"/>
-          </a:xfrm>
-          <a:prstGeom prst="triangle">
+            <a:off x="2753031" y="6206582"/>
+            <a:ext cx="7479892" cy="559830"/>
+          </a:xfrm>
+          <a:prstGeom prst="rect">
             <a:avLst/>
           </a:prstGeom>
         </p:spPr>
@@ -8386,16 +8398,16 @@
           <a:lstStyle/>
           <a:p>
             <a:pPr algn="ctr"/>
-            <a:endParaRPr lang="fr-CA"/>
-          </a:p>
-        </p:txBody>
-      </p:sp>
-      <p:sp>
-        <p:nvSpPr>
-          <p:cNvPr id="22" name="Rectangle 21">
-            <a:extLst>
-              <a:ext uri="{FF2B5EF4-FFF2-40B4-BE49-F238E27FC236}">
-                <a16:creationId xmlns:a16="http://schemas.microsoft.com/office/drawing/2014/main" id="{1E5095F3-2E57-13D7-9641-7C99CA3CDE44}"/>
+            <a:endParaRPr lang="fr-CA" dirty="0"/>
+          </a:p>
+        </p:txBody>
+      </p:sp>
+      <p:sp>
+        <p:nvSpPr>
+          <p:cNvPr id="23" name="Rectangle 22">
+            <a:extLst>
+              <a:ext uri="{FF2B5EF4-FFF2-40B4-BE49-F238E27FC236}">
+                <a16:creationId xmlns:a16="http://schemas.microsoft.com/office/drawing/2014/main" id="{3B1B9429-332C-3B5E-831C-2A54A07931CD}"/>
               </a:ext>
             </a:extLst>
           </p:cNvPr>
@@ -8404,53 +8416,7 @@
         </p:nvSpPr>
         <p:spPr>
           <a:xfrm>
-            <a:off x="2753031" y="6206582"/>
-            <a:ext cx="7479892" cy="559830"/>
-          </a:xfrm>
-          <a:prstGeom prst="rect">
-            <a:avLst/>
-          </a:prstGeom>
-        </p:spPr>
-        <p:style>
-          <a:lnRef idx="2">
-            <a:schemeClr val="accent1">
-              <a:shade val="15000"/>
-            </a:schemeClr>
-          </a:lnRef>
-          <a:fillRef idx="1">
-            <a:schemeClr val="accent1"/>
-          </a:fillRef>
-          <a:effectRef idx="0">
-            <a:schemeClr val="accent1"/>
-          </a:effectRef>
-          <a:fontRef idx="minor">
-            <a:schemeClr val="lt1"/>
-          </a:fontRef>
-        </p:style>
-        <p:txBody>
-          <a:bodyPr rtlCol="0" anchor="ctr"/>
-          <a:lstStyle/>
-          <a:p>
-            <a:pPr algn="ctr"/>
-            <a:endParaRPr lang="fr-CA" dirty="0"/>
-          </a:p>
-        </p:txBody>
-      </p:sp>
-      <p:sp>
-        <p:nvSpPr>
-          <p:cNvPr id="23" name="Rectangle 22">
-            <a:extLst>
-              <a:ext uri="{FF2B5EF4-FFF2-40B4-BE49-F238E27FC236}">
-                <a16:creationId xmlns:a16="http://schemas.microsoft.com/office/drawing/2014/main" id="{3B1B9429-332C-3B5E-831C-2A54A07931CD}"/>
-              </a:ext>
-            </a:extLst>
-          </p:cNvPr>
-          <p:cNvSpPr/>
-          <p:nvPr/>
-        </p:nvSpPr>
-        <p:spPr>
-          <a:xfrm>
-            <a:off x="2769002" y="2434975"/>
+            <a:off x="2724741" y="2445155"/>
             <a:ext cx="7479892" cy="224453"/>
           </a:xfrm>
           <a:prstGeom prst="rect">
@@ -9104,7 +9070,7 @@
         </p:nvCxnSpPr>
         <p:spPr>
           <a:xfrm>
-            <a:off x="3645303" y="4725157"/>
+            <a:off x="3655135" y="4786515"/>
             <a:ext cx="5727290" cy="0"/>
           </a:xfrm>
           <a:prstGeom prst="line">
@@ -9216,7 +9182,7 @@
         </p:nvSpPr>
         <p:spPr>
           <a:xfrm>
-            <a:off x="5361144" y="238498"/>
+            <a:off x="5490189" y="795719"/>
             <a:ext cx="2386675" cy="369332"/>
           </a:xfrm>
           <a:prstGeom prst="rect">
@@ -9628,36 +9594,6 @@
             <a:extLst>
               <a:ext uri="{FF2B5EF4-FFF2-40B4-BE49-F238E27FC236}">
                 <a16:creationId xmlns:a16="http://schemas.microsoft.com/office/drawing/2014/main" id="{7B1FACC1-53D4-87E6-EBAD-E1469EDE6C13}"/>
-              </a:ext>
-            </a:extLst>
-          </p:cNvPr>
-          <p:cNvPicPr>
-            <a:picLocks noChangeAspect="1"/>
-          </p:cNvPicPr>
-          <p:nvPr/>
-        </p:nvPicPr>
-        <p:blipFill>
-          <a:blip r:embed="rId2"/>
-          <a:stretch>
-            <a:fillRect/>
-          </a:stretch>
-        </p:blipFill>
-        <p:spPr>
-          <a:xfrm>
-            <a:off x="2753031" y="2740947"/>
-            <a:ext cx="795188" cy="745123"/>
-          </a:xfrm>
-          <a:prstGeom prst="rect">
-            <a:avLst/>
-          </a:prstGeom>
-        </p:spPr>
-      </p:pic>
-      <p:pic>
-        <p:nvPicPr>
-          <p:cNvPr id="58" name="Image 57">
-            <a:extLst>
-              <a:ext uri="{FF2B5EF4-FFF2-40B4-BE49-F238E27FC236}">
-                <a16:creationId xmlns:a16="http://schemas.microsoft.com/office/drawing/2014/main" id="{FFCBF016-54BA-EE3A-3694-538B93028422}"/>
               </a:ext>
             </a:extLst>
           </p:cNvPr>
@@ -9674,8 +9610,8 @@
         </p:blipFill>
         <p:spPr>
           <a:xfrm>
-            <a:off x="2753031" y="3656230"/>
-            <a:ext cx="803790" cy="741057"/>
+            <a:off x="2753031" y="2740947"/>
+            <a:ext cx="795188" cy="745123"/>
           </a:xfrm>
           <a:prstGeom prst="rect">
             <a:avLst/>
@@ -9684,10 +9620,10 @@
       </p:pic>
       <p:pic>
         <p:nvPicPr>
-          <p:cNvPr id="60" name="Image 59">
-            <a:extLst>
-              <a:ext uri="{FF2B5EF4-FFF2-40B4-BE49-F238E27FC236}">
-                <a16:creationId xmlns:a16="http://schemas.microsoft.com/office/drawing/2014/main" id="{7F026626-1A2A-76BD-E21F-F0E462AC36D7}"/>
+          <p:cNvPr id="58" name="Image 57">
+            <a:extLst>
+              <a:ext uri="{FF2B5EF4-FFF2-40B4-BE49-F238E27FC236}">
+                <a16:creationId xmlns:a16="http://schemas.microsoft.com/office/drawing/2014/main" id="{FFCBF016-54BA-EE3A-3694-538B93028422}"/>
               </a:ext>
             </a:extLst>
           </p:cNvPr>
@@ -9704,8 +9640,8 @@
         </p:blipFill>
         <p:spPr>
           <a:xfrm>
-            <a:off x="2753031" y="4520655"/>
-            <a:ext cx="803789" cy="746799"/>
+            <a:off x="2753031" y="3656230"/>
+            <a:ext cx="803790" cy="741057"/>
           </a:xfrm>
           <a:prstGeom prst="rect">
             <a:avLst/>
@@ -9714,10 +9650,10 @@
       </p:pic>
       <p:pic>
         <p:nvPicPr>
-          <p:cNvPr id="62" name="Image 61">
-            <a:extLst>
-              <a:ext uri="{FF2B5EF4-FFF2-40B4-BE49-F238E27FC236}">
-                <a16:creationId xmlns:a16="http://schemas.microsoft.com/office/drawing/2014/main" id="{468BC831-479F-F4A5-BAF8-08050DDCEC72}"/>
+          <p:cNvPr id="60" name="Image 59">
+            <a:extLst>
+              <a:ext uri="{FF2B5EF4-FFF2-40B4-BE49-F238E27FC236}">
+                <a16:creationId xmlns:a16="http://schemas.microsoft.com/office/drawing/2014/main" id="{7F026626-1A2A-76BD-E21F-F0E462AC36D7}"/>
               </a:ext>
             </a:extLst>
           </p:cNvPr>
@@ -9734,8 +9670,8 @@
         </p:blipFill>
         <p:spPr>
           <a:xfrm>
-            <a:off x="9479452" y="2780132"/>
-            <a:ext cx="759568" cy="755916"/>
+            <a:off x="2753031" y="4520655"/>
+            <a:ext cx="803789" cy="746799"/>
           </a:xfrm>
           <a:prstGeom prst="rect">
             <a:avLst/>
@@ -9744,10 +9680,10 @@
       </p:pic>
       <p:pic>
         <p:nvPicPr>
-          <p:cNvPr id="28" name="Image 27">
-            <a:extLst>
-              <a:ext uri="{FF2B5EF4-FFF2-40B4-BE49-F238E27FC236}">
-                <a16:creationId xmlns:a16="http://schemas.microsoft.com/office/drawing/2014/main" id="{4E648A66-19BF-419C-8FEA-EDAD8627CD7A}"/>
+          <p:cNvPr id="62" name="Image 61">
+            <a:extLst>
+              <a:ext uri="{FF2B5EF4-FFF2-40B4-BE49-F238E27FC236}">
+                <a16:creationId xmlns:a16="http://schemas.microsoft.com/office/drawing/2014/main" id="{468BC831-479F-F4A5-BAF8-08050DDCEC72}"/>
               </a:ext>
             </a:extLst>
           </p:cNvPr>
@@ -9764,8 +9700,8 @@
         </p:blipFill>
         <p:spPr>
           <a:xfrm>
-            <a:off x="9479452" y="3629607"/>
-            <a:ext cx="769442" cy="743512"/>
+            <a:off x="9479452" y="2780132"/>
+            <a:ext cx="759568" cy="755916"/>
           </a:xfrm>
           <a:prstGeom prst="rect">
             <a:avLst/>
@@ -9774,10 +9710,10 @@
       </p:pic>
       <p:pic>
         <p:nvPicPr>
-          <p:cNvPr id="30" name="Image 29">
-            <a:extLst>
-              <a:ext uri="{FF2B5EF4-FFF2-40B4-BE49-F238E27FC236}">
-                <a16:creationId xmlns:a16="http://schemas.microsoft.com/office/drawing/2014/main" id="{56021D9A-3FB6-F16D-3F14-63668E1A7489}"/>
+          <p:cNvPr id="28" name="Image 27">
+            <a:extLst>
+              <a:ext uri="{FF2B5EF4-FFF2-40B4-BE49-F238E27FC236}">
+                <a16:creationId xmlns:a16="http://schemas.microsoft.com/office/drawing/2014/main" id="{4E648A66-19BF-419C-8FEA-EDAD8627CD7A}"/>
               </a:ext>
             </a:extLst>
           </p:cNvPr>
@@ -9794,8 +9730,8 @@
         </p:blipFill>
         <p:spPr>
           <a:xfrm>
-            <a:off x="2767308" y="5370178"/>
-            <a:ext cx="762469" cy="706609"/>
+            <a:off x="9479452" y="3629607"/>
+            <a:ext cx="769442" cy="743512"/>
           </a:xfrm>
           <a:prstGeom prst="rect">
             <a:avLst/>
@@ -9804,10 +9740,10 @@
       </p:pic>
       <p:pic>
         <p:nvPicPr>
-          <p:cNvPr id="34" name="Image 33">
-            <a:extLst>
-              <a:ext uri="{FF2B5EF4-FFF2-40B4-BE49-F238E27FC236}">
-                <a16:creationId xmlns:a16="http://schemas.microsoft.com/office/drawing/2014/main" id="{B30BC359-573D-9958-2F81-95383EEAEA49}"/>
+          <p:cNvPr id="30" name="Image 29">
+            <a:extLst>
+              <a:ext uri="{FF2B5EF4-FFF2-40B4-BE49-F238E27FC236}">
+                <a16:creationId xmlns:a16="http://schemas.microsoft.com/office/drawing/2014/main" id="{56021D9A-3FB6-F16D-3F14-63668E1A7489}"/>
               </a:ext>
             </a:extLst>
           </p:cNvPr>
@@ -9824,6 +9760,36 @@
         </p:blipFill>
         <p:spPr>
           <a:xfrm>
+            <a:off x="2767308" y="5370178"/>
+            <a:ext cx="762469" cy="706609"/>
+          </a:xfrm>
+          <a:prstGeom prst="rect">
+            <a:avLst/>
+          </a:prstGeom>
+        </p:spPr>
+      </p:pic>
+      <p:pic>
+        <p:nvPicPr>
+          <p:cNvPr id="34" name="Image 33">
+            <a:extLst>
+              <a:ext uri="{FF2B5EF4-FFF2-40B4-BE49-F238E27FC236}">
+                <a16:creationId xmlns:a16="http://schemas.microsoft.com/office/drawing/2014/main" id="{B30BC359-573D-9958-2F81-95383EEAEA49}"/>
+              </a:ext>
+            </a:extLst>
+          </p:cNvPr>
+          <p:cNvPicPr>
+            <a:picLocks noChangeAspect="1"/>
+          </p:cNvPicPr>
+          <p:nvPr/>
+        </p:nvPicPr>
+        <p:blipFill>
+          <a:blip r:embed="rId9"/>
+          <a:stretch>
+            <a:fillRect/>
+          </a:stretch>
+        </p:blipFill>
+        <p:spPr>
+          <a:xfrm>
             <a:off x="9473355" y="5338336"/>
             <a:ext cx="803685" cy="718071"/>
           </a:xfrm>
@@ -9847,7 +9813,7 @@
           <p:nvPr/>
         </p:nvPicPr>
         <p:blipFill>
-          <a:blip r:embed="rId9"/>
+          <a:blip r:embed="rId10"/>
           <a:stretch>
             <a:fillRect/>
           </a:stretch>
